--- a/lectures/week4/lecture2/slides/week4_lecture2.pptx
+++ b/lectures/week4/lecture2/slides/week4_lecture2.pptx
@@ -2067,7 +2067,7 @@
         <p:spPr>
           <a:xfrm>
             <a:off x="335947" y="5102715"/>
-            <a:ext cx="6619392" cy="1569660"/>
+            <a:ext cx="6619392" cy="1323439"/>
           </a:xfrm>
           <a:prstGeom prst="rect">
             <a:avLst/>
@@ -2133,7 +2133,7 @@
                   <a:srgbClr val="66FF99"/>
                 </a:solidFill>
               </a:rPr>
-              <a:t>Lab 3 is released this Thursday 6:00 pm</a:t>
+              <a:t>No labs released this week</a:t>
             </a:r>
             <a:r>
               <a:rPr lang="en-US" sz="1600" dirty="0">
@@ -2204,85 +2204,8 @@
               <a:t>.</a:t>
             </a:r>
           </a:p>
-          <a:p>
-            <a:pPr marL="285750" indent="-285750">
-              <a:buClr>
-                <a:srgbClr val="CC99FF"/>
-              </a:buClr>
-              <a:buFont typeface="Wingdings" panose="05000000000000000000" pitchFamily="2" charset="2"/>
-              <a:buChar char="§"/>
-            </a:pPr>
-            <a:r>
-              <a:rPr lang="en-US" sz="1600" dirty="0">
-                <a:solidFill>
-                  <a:srgbClr val="66FF99"/>
-                </a:solidFill>
-              </a:rPr>
-              <a:t>Looking for more practice</a:t>
-            </a:r>
-            <a:r>
-              <a:rPr lang="en-US" sz="1600" dirty="0">
-                <a:solidFill>
-                  <a:srgbClr val="CC99FF"/>
-                </a:solidFill>
-              </a:rPr>
-              <a:t>?</a:t>
-            </a:r>
-            <a:r>
-              <a:rPr lang="en-US" sz="1600" dirty="0">
-                <a:solidFill>
-                  <a:srgbClr val="66FF99"/>
-                </a:solidFill>
-              </a:rPr>
-              <a:t> Check out the textbook</a:t>
-            </a:r>
-            <a:r>
-              <a:rPr lang="en-US" sz="1600" dirty="0">
-                <a:solidFill>
-                  <a:srgbClr val="CC99FF"/>
-                </a:solidFill>
-              </a:rPr>
-              <a:t>.</a:t>
-            </a:r>
-          </a:p>
-        </p:txBody>
-      </p:sp>
-      <p:pic>
-        <p:nvPicPr>
-          <p:cNvPr id="6" name="Picture 5" descr="A cartoon of a person sitting at a desk&#10;&#10;AI-generated content may be incorrect.">
-            <a:extLst>
-              <a:ext uri="{FF2B5EF4-FFF2-40B4-BE49-F238E27FC236}">
-                <a16:creationId xmlns:a16="http://schemas.microsoft.com/office/drawing/2014/main" id="{AD3F8AFC-1ECC-50D4-7EC5-97E0719D30D2}"/>
-              </a:ext>
-            </a:extLst>
-          </p:cNvPr>
-          <p:cNvPicPr>
-            <a:picLocks noChangeAspect="1"/>
-          </p:cNvPicPr>
-          <p:nvPr/>
-        </p:nvPicPr>
-        <p:blipFill>
-          <a:blip r:embed="rId2">
-            <a:extLst>
-              <a:ext uri="{28A0092B-C50C-407E-A947-70E740481C1C}">
-                <a14:useLocalDpi xmlns:a14="http://schemas.microsoft.com/office/drawing/2010/main" val="0"/>
-              </a:ext>
-            </a:extLst>
-          </a:blip>
-          <a:stretch>
-            <a:fillRect/>
-          </a:stretch>
-        </p:blipFill>
-        <p:spPr>
-          <a:xfrm>
-            <a:off x="7961376" y="1577781"/>
-            <a:ext cx="2954020" cy="4129892"/>
-          </a:xfrm>
-          <a:prstGeom prst="rect">
-            <a:avLst/>
-          </a:prstGeom>
-        </p:spPr>
-      </p:pic>
+        </p:txBody>
+      </p:sp>
     </p:spTree>
     <p:extLst>
       <p:ext uri="{BB962C8B-B14F-4D97-AF65-F5344CB8AC3E}">
@@ -6010,7 +5933,7 @@
         <p:spPr>
           <a:xfrm>
             <a:off x="335947" y="5102715"/>
-            <a:ext cx="6619392" cy="1569660"/>
+            <a:ext cx="6619392" cy="1323439"/>
           </a:xfrm>
           <a:prstGeom prst="rect">
             <a:avLst/>
@@ -6076,7 +5999,7 @@
                   <a:srgbClr val="66FF99"/>
                 </a:solidFill>
               </a:rPr>
-              <a:t>Lab 3 is released this Thursday 6:00 pm</a:t>
+              <a:t>No labs released this week</a:t>
             </a:r>
             <a:r>
               <a:rPr lang="en-US" sz="1600" dirty="0">
@@ -6137,47 +6060,6 @@
                 </a:solidFill>
               </a:rPr>
               <a:t>Tutorial (Online), Practical, Office Hour sessions running all week</a:t>
-            </a:r>
-            <a:r>
-              <a:rPr lang="en-US" sz="1600" dirty="0">
-                <a:solidFill>
-                  <a:srgbClr val="CC99FF"/>
-                </a:solidFill>
-              </a:rPr>
-              <a:t>.</a:t>
-            </a:r>
-          </a:p>
-          <a:p>
-            <a:pPr marL="285750" indent="-285750">
-              <a:buClr>
-                <a:srgbClr val="CC99FF"/>
-              </a:buClr>
-              <a:buFont typeface="Wingdings" panose="05000000000000000000" pitchFamily="2" charset="2"/>
-              <a:buChar char="§"/>
-            </a:pPr>
-            <a:r>
-              <a:rPr lang="en-US" sz="1600" dirty="0">
-                <a:solidFill>
-                  <a:srgbClr val="66FF99"/>
-                </a:solidFill>
-              </a:rPr>
-              <a:t>Looking for more practice</a:t>
-            </a:r>
-            <a:r>
-              <a:rPr lang="en-US" sz="1600" dirty="0">
-                <a:solidFill>
-                  <a:srgbClr val="CC99FF"/>
-                </a:solidFill>
-              </a:rPr>
-              <a:t>?</a:t>
-            </a:r>
-            <a:r>
-              <a:rPr lang="en-US" sz="1600" dirty="0">
-                <a:solidFill>
-                  <a:srgbClr val="66FF99"/>
-                </a:solidFill>
-              </a:rPr>
-              <a:t> Check out the textbook</a:t>
             </a:r>
             <a:r>
               <a:rPr lang="en-US" sz="1600" dirty="0">
